--- a/docs/expo/CADSmith-Expo-Deck.pptx
+++ b/docs/expo/CADSmith-Expo-Deck.pptx
@@ -12153,7 +12153,7 @@
                 <a:ea typeface="Arial" pitchFamily="34" charset="-122"/>
                 <a:cs typeface="Arial" pitchFamily="34" charset="-120"/>
               </a:rPr>
-              <a:t>Front, left, top and isometric, projected from the exported solid, with dimensions, a title block and a first-angle projection symbol.</a:t>
+              <a:t>Front, left, top and isometric, projected from the exported solid, with a title block and a first-angle projection symbol. A hole is called out Ø and a round R — 4× R5 — each size named once, the way a machinist reads one.</a:t>
             </a:r>
             <a:endParaRPr lang="en-US" sz="1200" dirty="0"/>
           </a:p>
